--- a/catalog/editorial/templates/ed_steps_horizontal_3.pptx
+++ b/catalog/editorial/templates/ed_steps_horizontal_3.pptx
@@ -3577,7 +3577,7 @@
           <a:noFill/>
         </p:spPr>
         <p:txBody>
-          <a:bodyPr wrap="square" lIns="18288" rIns="18288" tIns="13716" bIns="13716">
+          <a:bodyPr wrap="square" anchor="t" lIns="18288" rIns="18288" tIns="13716" bIns="13716">
             <a:noAutofit/>
           </a:bodyPr>
           <a:lstStyle/>
@@ -3632,7 +3632,7 @@
           <a:noFill/>
         </p:spPr>
         <p:txBody>
-          <a:bodyPr wrap="square" lIns="18288" rIns="18288" tIns="13716" bIns="13716">
+          <a:bodyPr wrap="square" anchor="t" lIns="18288" rIns="18288" tIns="13716" bIns="13716">
             <a:noAutofit/>
           </a:bodyPr>
           <a:lstStyle/>
@@ -3687,7 +3687,7 @@
           <a:noFill/>
         </p:spPr>
         <p:txBody>
-          <a:bodyPr wrap="square" lIns="18288" rIns="18288" tIns="13716" bIns="13716">
+          <a:bodyPr wrap="square" anchor="t" lIns="18288" rIns="18288" tIns="13716" bIns="13716">
             <a:noAutofit/>
           </a:bodyPr>
           <a:lstStyle/>
@@ -3786,7 +3786,7 @@
           <a:noFill/>
         </p:spPr>
         <p:txBody>
-          <a:bodyPr wrap="square" lIns="18288" rIns="18288" tIns="13716" bIns="13716">
+          <a:bodyPr wrap="square" anchor="t" lIns="18288" rIns="18288" tIns="13716" bIns="13716">
             <a:noAutofit/>
           </a:bodyPr>
           <a:lstStyle/>
@@ -3841,7 +3841,7 @@
           <a:noFill/>
         </p:spPr>
         <p:txBody>
-          <a:bodyPr wrap="square" lIns="18288" rIns="18288" tIns="13716" bIns="13716">
+          <a:bodyPr wrap="square" anchor="t" lIns="18288" rIns="18288" tIns="13716" bIns="13716">
             <a:noAutofit/>
           </a:bodyPr>
           <a:lstStyle/>
@@ -3896,7 +3896,7 @@
           <a:noFill/>
         </p:spPr>
         <p:txBody>
-          <a:bodyPr wrap="square" lIns="18288" rIns="18288" tIns="13716" bIns="13716">
+          <a:bodyPr wrap="square" anchor="t" lIns="18288" rIns="18288" tIns="13716" bIns="13716">
             <a:noAutofit/>
           </a:bodyPr>
           <a:lstStyle/>
@@ -3995,7 +3995,7 @@
           <a:noFill/>
         </p:spPr>
         <p:txBody>
-          <a:bodyPr wrap="square" lIns="18288" rIns="18288" tIns="13716" bIns="13716">
+          <a:bodyPr wrap="square" anchor="t" lIns="18288" rIns="18288" tIns="13716" bIns="13716">
             <a:noAutofit/>
           </a:bodyPr>
           <a:lstStyle/>
@@ -4050,7 +4050,7 @@
           <a:noFill/>
         </p:spPr>
         <p:txBody>
-          <a:bodyPr wrap="square" lIns="18288" rIns="18288" tIns="13716" bIns="13716">
+          <a:bodyPr wrap="square" anchor="t" lIns="18288" rIns="18288" tIns="13716" bIns="13716">
             <a:noAutofit/>
           </a:bodyPr>
           <a:lstStyle/>
@@ -4105,7 +4105,7 @@
           <a:noFill/>
         </p:spPr>
         <p:txBody>
-          <a:bodyPr wrap="square" lIns="18288" rIns="18288" tIns="13716" bIns="13716">
+          <a:bodyPr wrap="square" anchor="t" lIns="18288" rIns="18288" tIns="13716" bIns="13716">
             <a:noAutofit/>
           </a:bodyPr>
           <a:lstStyle/>
@@ -4204,7 +4204,7 @@
           <a:noFill/>
         </p:spPr>
         <p:txBody>
-          <a:bodyPr wrap="square" lIns="18288" rIns="18288" tIns="13716" bIns="13716">
+          <a:bodyPr wrap="square" anchor="t" lIns="18288" rIns="18288" tIns="13716" bIns="13716">
             <a:noAutofit/>
           </a:bodyPr>
           <a:lstStyle/>
@@ -4259,7 +4259,7 @@
           <a:noFill/>
         </p:spPr>
         <p:txBody>
-          <a:bodyPr wrap="square" lIns="18288" rIns="18288" tIns="13716" bIns="13716">
+          <a:bodyPr wrap="square" anchor="t" lIns="18288" rIns="18288" tIns="13716" bIns="13716">
             <a:noAutofit/>
           </a:bodyPr>
           <a:lstStyle/>
@@ -4314,7 +4314,7 @@
           <a:noFill/>
         </p:spPr>
         <p:txBody>
-          <a:bodyPr wrap="square" lIns="18288" rIns="18288" tIns="13716" bIns="13716">
+          <a:bodyPr wrap="square" anchor="t" lIns="18288" rIns="18288" tIns="13716" bIns="13716">
             <a:noAutofit/>
           </a:bodyPr>
           <a:lstStyle/>
@@ -4413,7 +4413,7 @@
           <a:noFill/>
         </p:spPr>
         <p:txBody>
-          <a:bodyPr wrap="square" lIns="18288" rIns="18288" tIns="13716" bIns="13716">
+          <a:bodyPr wrap="square" anchor="t" lIns="18288" rIns="18288" tIns="13716" bIns="13716">
             <a:noAutofit/>
           </a:bodyPr>
           <a:lstStyle/>
@@ -4468,7 +4468,7 @@
           <a:noFill/>
         </p:spPr>
         <p:txBody>
-          <a:bodyPr wrap="square" lIns="18288" rIns="18288" tIns="13716" bIns="13716">
+          <a:bodyPr wrap="square" anchor="t" lIns="18288" rIns="18288" tIns="13716" bIns="13716">
             <a:noAutofit/>
           </a:bodyPr>
           <a:lstStyle/>
